--- a/ITC4214 FINAL PRESENTATION.pptx
+++ b/ITC4214 FINAL PRESENTATION.pptx
@@ -5,7 +5,7 @@
     <p:sldMasterId id="2147483672" r:id="rId4"/>
   </p:sldMasterIdLst>
   <p:notesMasterIdLst>
-    <p:notesMasterId r:id="rId21"/>
+    <p:notesMasterId r:id="rId23"/>
   </p:notesMasterIdLst>
   <p:sldIdLst>
     <p:sldId id="256" r:id="rId5"/>
@@ -24,6 +24,8 @@
     <p:sldId id="265" r:id="rId18"/>
     <p:sldId id="268" r:id="rId19"/>
     <p:sldId id="261" r:id="rId20"/>
+    <p:sldId id="273" r:id="rId21"/>
+    <p:sldId id="274" r:id="rId22"/>
   </p:sldIdLst>
   <p:sldSz cx="12192000" cy="6858000"/>
   <p:notesSz cx="6858000" cy="9144000"/>
@@ -212,7 +214,7 @@
           <a:p>
             <a:fld id="{482EB97E-983D-4ACB-892F-788571CB4667}" type="datetimeFigureOut">
               <a:rPr lang="en-GB" smtClean="0"/>
-              <a:t>21/06/2026</a:t>
+              <a:t>19/07/2026</a:t>
             </a:fld>
             <a:endParaRPr lang="en-GB"/>
           </a:p>
@@ -695,7 +697,7 @@
           <a:p>
             <a:fld id="{0CBDF44C-E8AF-4F1C-AA97-0EA9C7544E9F}" type="datetimeFigureOut">
               <a:rPr lang="en-GB" smtClean="0"/>
-              <a:t>21/06/2026</a:t>
+              <a:t>19/07/2026</a:t>
             </a:fld>
             <a:endParaRPr lang="en-GB"/>
           </a:p>
@@ -865,7 +867,7 @@
           <a:p>
             <a:fld id="{0CBDF44C-E8AF-4F1C-AA97-0EA9C7544E9F}" type="datetimeFigureOut">
               <a:rPr lang="en-GB" smtClean="0"/>
-              <a:t>21/06/2026</a:t>
+              <a:t>19/07/2026</a:t>
             </a:fld>
             <a:endParaRPr lang="en-GB"/>
           </a:p>
@@ -1045,7 +1047,7 @@
           <a:p>
             <a:fld id="{0CBDF44C-E8AF-4F1C-AA97-0EA9C7544E9F}" type="datetimeFigureOut">
               <a:rPr lang="en-GB" smtClean="0"/>
-              <a:t>21/06/2026</a:t>
+              <a:t>19/07/2026</a:t>
             </a:fld>
             <a:endParaRPr lang="en-GB"/>
           </a:p>
@@ -1215,7 +1217,7 @@
           <a:p>
             <a:fld id="{0CBDF44C-E8AF-4F1C-AA97-0EA9C7544E9F}" type="datetimeFigureOut">
               <a:rPr lang="en-GB" smtClean="0"/>
-              <a:t>21/06/2026</a:t>
+              <a:t>19/07/2026</a:t>
             </a:fld>
             <a:endParaRPr lang="en-GB"/>
           </a:p>
@@ -1461,7 +1463,7 @@
           <a:p>
             <a:fld id="{0CBDF44C-E8AF-4F1C-AA97-0EA9C7544E9F}" type="datetimeFigureOut">
               <a:rPr lang="en-GB" smtClean="0"/>
-              <a:t>21/06/2026</a:t>
+              <a:t>19/07/2026</a:t>
             </a:fld>
             <a:endParaRPr lang="en-GB"/>
           </a:p>
@@ -1693,7 +1695,7 @@
           <a:p>
             <a:fld id="{0CBDF44C-E8AF-4F1C-AA97-0EA9C7544E9F}" type="datetimeFigureOut">
               <a:rPr lang="en-GB" smtClean="0"/>
-              <a:t>21/06/2026</a:t>
+              <a:t>19/07/2026</a:t>
             </a:fld>
             <a:endParaRPr lang="en-GB"/>
           </a:p>
@@ -2060,7 +2062,7 @@
           <a:p>
             <a:fld id="{0CBDF44C-E8AF-4F1C-AA97-0EA9C7544E9F}" type="datetimeFigureOut">
               <a:rPr lang="en-GB" smtClean="0"/>
-              <a:t>21/06/2026</a:t>
+              <a:t>19/07/2026</a:t>
             </a:fld>
             <a:endParaRPr lang="en-GB"/>
           </a:p>
@@ -2178,7 +2180,7 @@
           <a:p>
             <a:fld id="{0CBDF44C-E8AF-4F1C-AA97-0EA9C7544E9F}" type="datetimeFigureOut">
               <a:rPr lang="en-GB" smtClean="0"/>
-              <a:t>21/06/2026</a:t>
+              <a:t>19/07/2026</a:t>
             </a:fld>
             <a:endParaRPr lang="en-GB"/>
           </a:p>
@@ -2273,7 +2275,7 @@
           <a:p>
             <a:fld id="{0CBDF44C-E8AF-4F1C-AA97-0EA9C7544E9F}" type="datetimeFigureOut">
               <a:rPr lang="en-GB" smtClean="0"/>
-              <a:t>21/06/2026</a:t>
+              <a:t>19/07/2026</a:t>
             </a:fld>
             <a:endParaRPr lang="en-GB"/>
           </a:p>
@@ -2550,7 +2552,7 @@
           <a:p>
             <a:fld id="{0CBDF44C-E8AF-4F1C-AA97-0EA9C7544E9F}" type="datetimeFigureOut">
               <a:rPr lang="en-GB" smtClean="0"/>
-              <a:t>21/06/2026</a:t>
+              <a:t>19/07/2026</a:t>
             </a:fld>
             <a:endParaRPr lang="en-GB"/>
           </a:p>
@@ -2807,7 +2809,7 @@
           <a:p>
             <a:fld id="{0CBDF44C-E8AF-4F1C-AA97-0EA9C7544E9F}" type="datetimeFigureOut">
               <a:rPr lang="en-GB" smtClean="0"/>
-              <a:t>21/06/2026</a:t>
+              <a:t>19/07/2026</a:t>
             </a:fld>
             <a:endParaRPr lang="en-GB"/>
           </a:p>
@@ -3020,7 +3022,7 @@
           <a:p>
             <a:fld id="{0CBDF44C-E8AF-4F1C-AA97-0EA9C7544E9F}" type="datetimeFigureOut">
               <a:rPr lang="en-GB" smtClean="0"/>
-              <a:t>21/06/2026</a:t>
+              <a:t>19/07/2026</a:t>
             </a:fld>
             <a:endParaRPr lang="en-GB"/>
           </a:p>
@@ -4098,6 +4100,304 @@
     <p:extLst>
       <p:ext uri="{BB962C8B-B14F-4D97-AF65-F5344CB8AC3E}">
         <p14:creationId xmlns:p14="http://schemas.microsoft.com/office/powerpoint/2010/main" val="2070668641"/>
+      </p:ext>
+    </p:extLst>
+  </p:cSld>
+  <p:clrMapOvr>
+    <a:masterClrMapping/>
+  </p:clrMapOvr>
+</p:sld>
+</file>
+
+<file path=ppt/slides/slide17.xml><?xml version="1.0" encoding="utf-8"?>
+<p:sld xmlns:a="http://schemas.openxmlformats.org/drawingml/2006/main" xmlns:r="http://schemas.openxmlformats.org/officeDocument/2006/relationships" xmlns:p="http://schemas.openxmlformats.org/presentationml/2006/main">
+  <p:cSld>
+    <p:spTree>
+      <p:nvGrpSpPr>
+        <p:cNvPr id="1" name=""/>
+        <p:cNvGrpSpPr/>
+        <p:nvPr/>
+      </p:nvGrpSpPr>
+      <p:grpSpPr>
+        <a:xfrm>
+          <a:off x="0" y="0"/>
+          <a:ext cx="0" cy="0"/>
+          <a:chOff x="0" y="0"/>
+          <a:chExt cx="0" cy="0"/>
+        </a:xfrm>
+      </p:grpSpPr>
+      <p:sp>
+        <p:nvSpPr>
+          <p:cNvPr id="2" name="Title 1">
+            <a:extLst>
+              <a:ext uri="{FF2B5EF4-FFF2-40B4-BE49-F238E27FC236}">
+                <a16:creationId xmlns:a16="http://schemas.microsoft.com/office/drawing/2014/main" id="{A0FF10A2-7D76-6B43-1DE4-4491122B35E8}"/>
+              </a:ext>
+            </a:extLst>
+          </p:cNvPr>
+          <p:cNvSpPr>
+            <a:spLocks noGrp="1"/>
+          </p:cNvSpPr>
+          <p:nvPr>
+            <p:ph type="title"/>
+          </p:nvPr>
+        </p:nvSpPr>
+        <p:spPr/>
+        <p:txBody>
+          <a:bodyPr/>
+          <a:lstStyle/>
+          <a:p>
+            <a:r>
+              <a:rPr lang="en-US" b="1" dirty="0">
+                <a:solidFill>
+                  <a:srgbClr val="FF0000"/>
+                </a:solidFill>
+              </a:rPr>
+              <a:t>LIVE </a:t>
+            </a:r>
+            <a:r>
+              <a:rPr lang="en-US" dirty="0"/>
+              <a:t>NOW</a:t>
+            </a:r>
+            <a:endParaRPr lang="en-GB" dirty="0"/>
+          </a:p>
+        </p:txBody>
+      </p:sp>
+      <p:sp>
+        <p:nvSpPr>
+          <p:cNvPr id="3" name="Content Placeholder 2">
+            <a:extLst>
+              <a:ext uri="{FF2B5EF4-FFF2-40B4-BE49-F238E27FC236}">
+                <a16:creationId xmlns:a16="http://schemas.microsoft.com/office/drawing/2014/main" id="{CC3F6BE3-66CE-FB2E-932B-99BC8387237D}"/>
+              </a:ext>
+            </a:extLst>
+          </p:cNvPr>
+          <p:cNvSpPr>
+            <a:spLocks noGrp="1"/>
+          </p:cNvSpPr>
+          <p:nvPr>
+            <p:ph idx="1"/>
+          </p:nvPr>
+        </p:nvSpPr>
+        <p:spPr/>
+        <p:txBody>
+          <a:bodyPr>
+            <a:normAutofit lnSpcReduction="10000"/>
+          </a:bodyPr>
+          <a:lstStyle/>
+          <a:p>
+            <a:pPr marL="0" indent="0">
+              <a:buNone/>
+            </a:pPr>
+            <a:r>
+              <a:rPr lang="en-GB" dirty="0">
+                <a:hlinkClick r:id="rId2"/>
+              </a:rPr>
+              <a:t>https://aktenas.pythonanywhere.com</a:t>
+            </a:r>
+            <a:endParaRPr lang="en-GB" dirty="0"/>
+          </a:p>
+          <a:p>
+            <a:pPr marL="0" indent="0">
+              <a:buNone/>
+            </a:pPr>
+            <a:endParaRPr lang="en-GB" dirty="0"/>
+          </a:p>
+          <a:p>
+            <a:pPr marL="0" indent="0">
+              <a:buNone/>
+            </a:pPr>
+            <a:r>
+              <a:rPr lang="en-GB" dirty="0">
+                <a:solidFill>
+                  <a:srgbClr val="FF0000"/>
+                </a:solidFill>
+              </a:rPr>
+              <a:t>[Staff Admin Account] </a:t>
+            </a:r>
+          </a:p>
+          <a:p>
+            <a:pPr marL="0" indent="0">
+              <a:buNone/>
+            </a:pPr>
+            <a:r>
+              <a:rPr lang="en-GB" dirty="0"/>
+              <a:t>Username: admin </a:t>
+            </a:r>
+          </a:p>
+          <a:p>
+            <a:pPr marL="0" indent="0">
+              <a:buNone/>
+            </a:pPr>
+            <a:r>
+              <a:rPr lang="en-GB" dirty="0"/>
+              <a:t>Password: 6afVmvEPQ+afWp </a:t>
+            </a:r>
+          </a:p>
+          <a:p>
+            <a:pPr marL="0" indent="0">
+              <a:buNone/>
+            </a:pPr>
+            <a:endParaRPr lang="en-GB" dirty="0"/>
+          </a:p>
+          <a:p>
+            <a:pPr marL="0" indent="0">
+              <a:buNone/>
+            </a:pPr>
+            <a:r>
+              <a:rPr lang="en-GB" dirty="0">
+                <a:solidFill>
+                  <a:srgbClr val="FF0000"/>
+                </a:solidFill>
+              </a:rPr>
+              <a:t>[Standard Customer Account] </a:t>
+            </a:r>
+          </a:p>
+          <a:p>
+            <a:pPr marL="0" indent="0">
+              <a:buNone/>
+            </a:pPr>
+            <a:r>
+              <a:rPr lang="en-GB" dirty="0"/>
+              <a:t>Username: </a:t>
+            </a:r>
+            <a:r>
+              <a:rPr lang="en-GB" dirty="0" err="1"/>
+              <a:t>aktenas</a:t>
+            </a:r>
+            <a:r>
+              <a:rPr lang="en-GB" dirty="0"/>
+              <a:t> </a:t>
+            </a:r>
+          </a:p>
+          <a:p>
+            <a:pPr marL="0" indent="0">
+              <a:buNone/>
+            </a:pPr>
+            <a:r>
+              <a:rPr lang="en-GB" dirty="0"/>
+              <a:t>Password: 0~jo1Oe4V|69</a:t>
+            </a:r>
+          </a:p>
+          <a:p>
+            <a:pPr marL="0" indent="0">
+              <a:buNone/>
+            </a:pPr>
+            <a:endParaRPr lang="en-GB" dirty="0"/>
+          </a:p>
+        </p:txBody>
+      </p:sp>
+    </p:spTree>
+    <p:extLst>
+      <p:ext uri="{BB962C8B-B14F-4D97-AF65-F5344CB8AC3E}">
+        <p14:creationId xmlns:p14="http://schemas.microsoft.com/office/powerpoint/2010/main" val="6151434"/>
+      </p:ext>
+    </p:extLst>
+  </p:cSld>
+  <p:clrMapOvr>
+    <a:masterClrMapping/>
+  </p:clrMapOvr>
+</p:sld>
+</file>
+
+<file path=ppt/slides/slide18.xml><?xml version="1.0" encoding="utf-8"?>
+<p:sld xmlns:a="http://schemas.openxmlformats.org/drawingml/2006/main" xmlns:r="http://schemas.openxmlformats.org/officeDocument/2006/relationships" xmlns:p="http://schemas.openxmlformats.org/presentationml/2006/main">
+  <p:cSld>
+    <p:spTree>
+      <p:nvGrpSpPr>
+        <p:cNvPr id="1" name=""/>
+        <p:cNvGrpSpPr/>
+        <p:nvPr/>
+      </p:nvGrpSpPr>
+      <p:grpSpPr>
+        <a:xfrm>
+          <a:off x="0" y="0"/>
+          <a:ext cx="0" cy="0"/>
+          <a:chOff x="0" y="0"/>
+          <a:chExt cx="0" cy="0"/>
+        </a:xfrm>
+      </p:grpSpPr>
+      <p:sp>
+        <p:nvSpPr>
+          <p:cNvPr id="2" name="Title 1">
+            <a:extLst>
+              <a:ext uri="{FF2B5EF4-FFF2-40B4-BE49-F238E27FC236}">
+                <a16:creationId xmlns:a16="http://schemas.microsoft.com/office/drawing/2014/main" id="{F59F3D94-ED6B-568E-F6CF-D0238695FD5F}"/>
+              </a:ext>
+            </a:extLst>
+          </p:cNvPr>
+          <p:cNvSpPr>
+            <a:spLocks noGrp="1"/>
+          </p:cNvSpPr>
+          <p:nvPr>
+            <p:ph type="title"/>
+          </p:nvPr>
+        </p:nvSpPr>
+        <p:spPr/>
+        <p:txBody>
+          <a:bodyPr/>
+          <a:lstStyle/>
+          <a:p>
+            <a:r>
+              <a:rPr lang="en-US" b="1" dirty="0">
+                <a:solidFill>
+                  <a:srgbClr val="FF0000"/>
+                </a:solidFill>
+              </a:rPr>
+              <a:t>GITHUB </a:t>
+            </a:r>
+            <a:r>
+              <a:rPr lang="en-US" dirty="0"/>
+              <a:t>REPOSITORY</a:t>
+            </a:r>
+            <a:endParaRPr lang="en-GB" dirty="0"/>
+          </a:p>
+        </p:txBody>
+      </p:sp>
+      <p:sp>
+        <p:nvSpPr>
+          <p:cNvPr id="3" name="Content Placeholder 2">
+            <a:extLst>
+              <a:ext uri="{FF2B5EF4-FFF2-40B4-BE49-F238E27FC236}">
+                <a16:creationId xmlns:a16="http://schemas.microsoft.com/office/drawing/2014/main" id="{23F69A34-0FDD-E849-A97A-CE79477F937E}"/>
+              </a:ext>
+            </a:extLst>
+          </p:cNvPr>
+          <p:cNvSpPr>
+            <a:spLocks noGrp="1"/>
+          </p:cNvSpPr>
+          <p:nvPr>
+            <p:ph idx="1"/>
+          </p:nvPr>
+        </p:nvSpPr>
+        <p:spPr/>
+        <p:txBody>
+          <a:bodyPr/>
+          <a:lstStyle/>
+          <a:p>
+            <a:pPr marL="0" indent="0">
+              <a:buNone/>
+            </a:pPr>
+            <a:r>
+              <a:rPr lang="en-GB" dirty="0">
+                <a:hlinkClick r:id="rId2"/>
+              </a:rPr>
+              <a:t>https://github.com/aktenas/C4-Eshop</a:t>
+            </a:r>
+            <a:endParaRPr lang="en-GB" dirty="0"/>
+          </a:p>
+          <a:p>
+            <a:pPr marL="0" indent="0">
+              <a:buNone/>
+            </a:pPr>
+            <a:endParaRPr lang="en-GB" dirty="0"/>
+          </a:p>
+        </p:txBody>
+      </p:sp>
+    </p:spTree>
+    <p:extLst>
+      <p:ext uri="{BB962C8B-B14F-4D97-AF65-F5344CB8AC3E}">
+        <p14:creationId xmlns:p14="http://schemas.microsoft.com/office/powerpoint/2010/main" val="2451832501"/>
       </p:ext>
     </p:extLst>
   </p:cSld>
@@ -6437,15 +6737,6 @@
 </file>
 
 <file path=customXml/item1.xml><?xml version="1.0" encoding="utf-8"?>
-<?mso-contentType ?>
-<FormTemplates xmlns="http://schemas.microsoft.com/sharepoint/v3/contenttype/forms">
-  <Display>DocumentLibraryForm</Display>
-  <Edit>DocumentLibraryForm</Edit>
-  <New>DocumentLibraryForm</New>
-</FormTemplates>
-</file>
-
-<file path=customXml/item2.xml><?xml version="1.0" encoding="utf-8"?>
 <ct:contentTypeSchema xmlns:ct="http://schemas.microsoft.com/office/2006/metadata/contentType" xmlns:ma="http://schemas.microsoft.com/office/2006/metadata/properties/metaAttributes" ct:_="" ma:_="" ma:contentTypeName="Document" ma:contentTypeID="0x01010050CA3F38B114734889201ADB0EC31B09" ma:contentTypeVersion="16" ma:contentTypeDescription="Create a new document." ma:contentTypeScope="" ma:versionID="f1833972cd2d0f23f15c24742cfa96ea">
   <xsd:schema xmlns:xsd="http://www.w3.org/2001/XMLSchema" xmlns:xs="http://www.w3.org/2001/XMLSchema" xmlns:p="http://schemas.microsoft.com/office/2006/metadata/properties" xmlns:ns3="2eb4c2f5-5a81-4eff-a4a8-8ba234aba6e2" xmlns:ns4="62bf0a27-8611-43f0-b1d5-9331c9c77b51" targetNamespace="http://schemas.microsoft.com/office/2006/metadata/properties" ma:root="true" ma:fieldsID="47e44216f717f52e37a50f97b098e5e0" ns3:_="" ns4:_="">
     <xsd:import namespace="2eb4c2f5-5a81-4eff-a4a8-8ba234aba6e2"/>
@@ -6686,6 +6977,15 @@
 </ct:contentTypeSchema>
 </file>
 
+<file path=customXml/item2.xml><?xml version="1.0" encoding="utf-8"?>
+<?mso-contentType ?>
+<FormTemplates xmlns="http://schemas.microsoft.com/sharepoint/v3/contenttype/forms">
+  <Display>DocumentLibraryForm</Display>
+  <Edit>DocumentLibraryForm</Edit>
+  <New>DocumentLibraryForm</New>
+</FormTemplates>
+</file>
+
 <file path=customXml/item3.xml><?xml version="1.0" encoding="utf-8"?>
 <p:properties xmlns:p="http://schemas.microsoft.com/office/2006/metadata/properties" xmlns:xsi="http://www.w3.org/2001/XMLSchema-instance" xmlns:pc="http://schemas.microsoft.com/office/infopath/2007/PartnerControls">
   <documentManagement>
@@ -6695,14 +6995,6 @@
 </file>
 
 <file path=customXml/itemProps1.xml><?xml version="1.0" encoding="utf-8"?>
-<ds:datastoreItem xmlns:ds="http://schemas.openxmlformats.org/officeDocument/2006/customXml" ds:itemID="{604644B1-D399-447C-A1E2-9956C61F7C8D}">
-  <ds:schemaRefs>
-    <ds:schemaRef ds:uri="http://schemas.microsoft.com/sharepoint/v3/contenttype/forms"/>
-  </ds:schemaRefs>
-</ds:datastoreItem>
-</file>
-
-<file path=customXml/itemProps2.xml><?xml version="1.0" encoding="utf-8"?>
 <ds:datastoreItem xmlns:ds="http://schemas.openxmlformats.org/officeDocument/2006/customXml" ds:itemID="{099FFBCF-A898-4947-8BA6-7A4AA2BAC300}">
   <ds:schemaRefs>
     <ds:schemaRef ds:uri="http://schemas.microsoft.com/office/2006/metadata/contentType"/>
@@ -6717,6 +7009,14 @@
     <ds:schemaRef ds:uri="http://purl.org/dc/elements/1.1/"/>
     <ds:schemaRef ds:uri="http://purl.org/dc/terms/"/>
     <ds:schemaRef ds:uri="http://schemas.microsoft.com/internal/obd"/>
+  </ds:schemaRefs>
+</ds:datastoreItem>
+</file>
+
+<file path=customXml/itemProps2.xml><?xml version="1.0" encoding="utf-8"?>
+<ds:datastoreItem xmlns:ds="http://schemas.openxmlformats.org/officeDocument/2006/customXml" ds:itemID="{604644B1-D399-447C-A1E2-9956C61F7C8D}">
+  <ds:schemaRefs>
+    <ds:schemaRef ds:uri="http://schemas.microsoft.com/sharepoint/v3/contenttype/forms"/>
   </ds:schemaRefs>
 </ds:datastoreItem>
 </file>
